--- a/docs/SALVAGE-pitch-deck.pptx
+++ b/docs/SALVAGE-pitch-deck.pptx
@@ -260,7 +260,7 @@
                   <c:v>0</c:v>
                 </c:pt>
                 <c:pt idx="3">
-                  <c:v>62.7</c:v>
+                  <c:v>61.3</c:v>
                 </c:pt>
               </c:numCache>
             </c:numRef>
@@ -3528,7 +3528,7 @@
                 <a:ea typeface="Calibri" pitchFamily="34" charset="-122"/>
                 <a:cs typeface="Calibri" pitchFamily="34" charset="-120"/>
               </a:rPr>
-              <a:t>Two verdicts on one model: nothing on failures we already understand, 85% of the recoverable ground on failures we don't. Because we could tell them apart.</a:t>
+              <a:t>Two verdicts on one model: nothing on failures we already understand, 84% of the recoverable ground on failures we don't. Because we could tell them apart.</a:t>
             </a:r>
             <a:endParaRPr lang="en-US" sz="1350" dirty="0"/>
           </a:p>
@@ -6679,7 +6679,7 @@
                 <a:ea typeface="Calibri" pitchFamily="34" charset="-122"/>
                 <a:cs typeface="Calibri" pitchFamily="34" charset="-120"/>
               </a:rPr>
-              <a:t>MODEL ON — THREE RUNS</a:t>
+              <a:t>MODEL ON — FOUR RUNS</a:t>
             </a:r>
             <a:endParaRPr lang="en-US" sz="1100" dirty="0"/>
           </a:p>
@@ -6710,7 +6710,7 @@
               <a:buNone/>
             </a:pPr>
             <a:r>
-              <a:rPr lang="en-US" sz="3000" b="1" dirty="0">
+              <a:rPr lang="en-US" sz="2600" b="1" dirty="0">
                 <a:solidFill>
                   <a:srgbClr val="FFC94A"/>
                 </a:solidFill>
@@ -6718,9 +6718,9 @@
                 <a:ea typeface="Calibri" pitchFamily="34" charset="-122"/>
                 <a:cs typeface="Calibri" pitchFamily="34" charset="-120"/>
               </a:rPr>
-              <a:t>72.0  ·  70.0  ·  68.0</a:t>
-            </a:r>
-            <a:endParaRPr lang="en-US" sz="3000" dirty="0"/>
+              <a:t>72.0 · 71.7 · 70.0 · 68.0</a:t>
+            </a:r>
+            <a:endParaRPr lang="en-US" sz="2600" dirty="0"/>
           </a:p>
         </p:txBody>
       </p:sp>
@@ -7093,7 +7093,7 @@
                 <a:ea typeface="Calibri" pitchFamily="34" charset="-122"/>
                 <a:cs typeface="Calibri" pitchFamily="34" charset="-120"/>
               </a:rPr>
-              <a:t>85%</a:t>
+              <a:t>84%</a:t>
             </a:r>
             <a:endParaRPr lang="en-US" sz="4400" dirty="0"/>
           </a:p>
@@ -7198,7 +7198,7 @@
                 <a:ea typeface="Calibri" pitchFamily="34" charset="-122"/>
                 <a:cs typeface="Calibri" pitchFamily="34" charset="-120"/>
               </a:rPr>
-              <a:t>150 → 25</a:t>
+              <a:t>150 → 28</a:t>
             </a:r>
             <a:endParaRPr lang="en-US" sz="3200" dirty="0"/>
           </a:p>
@@ -7532,7 +7532,7 @@
                 <a:ea typeface="Calibri" pitchFamily="34" charset="-122"/>
                 <a:cs typeface="Calibri" pitchFamily="34" charset="-120"/>
               </a:rPr>
-              <a:t>88%</a:t>
+              <a:t>87%</a:t>
             </a:r>
             <a:endParaRPr lang="en-US" sz="4200" dirty="0"/>
           </a:p>
@@ -8190,7 +8190,7 @@
                 <a:ea typeface="Calibri" pitchFamily="34" charset="-122"/>
                 <a:cs typeface="Calibri" pitchFamily="34" charset="-120"/>
               </a:rPr>
-              <a:t>192 / 192</a:t>
+              <a:t>187 / 187</a:t>
             </a:r>
             <a:endParaRPr lang="en-US" sz="2600" dirty="0"/>
           </a:p>

--- a/docs/SALVAGE-pitch-deck.pptx
+++ b/docs/SALVAGE-pitch-deck.pptx
@@ -6679,7 +6679,7 @@
                 <a:ea typeface="Calibri" pitchFamily="34" charset="-122"/>
                 <a:cs typeface="Calibri" pitchFamily="34" charset="-120"/>
               </a:rPr>
-              <a:t>MODEL ON — FOUR RUNS</a:t>
+              <a:t>MODEL ON — FIVE RUNS</a:t>
             </a:r>
             <a:endParaRPr lang="en-US" sz="1100" dirty="0"/>
           </a:p>
@@ -6693,7 +6693,7 @@
         </p:nvSpPr>
         <p:spPr>
           <a:xfrm>
-            <a:off x="6793992" y="2286000"/>
+            <a:off x="6793992" y="2231136"/>
             <a:ext cx="4572000" cy="822960"/>
           </a:xfrm>
           <a:prstGeom prst="rect">
@@ -6710,7 +6710,7 @@
               <a:buNone/>
             </a:pPr>
             <a:r>
-              <a:rPr lang="en-US" sz="2600" b="1" dirty="0">
+              <a:rPr lang="en-US" sz="4000" b="1" dirty="0">
                 <a:solidFill>
                   <a:srgbClr val="FFC94A"/>
                 </a:solidFill>
@@ -6718,9 +6718,9 @@
                 <a:ea typeface="Calibri" pitchFamily="34" charset="-122"/>
                 <a:cs typeface="Calibri" pitchFamily="34" charset="-120"/>
               </a:rPr>
-              <a:t>72.0 · 71.7 · 70.0 · 68.0</a:t>
-            </a:r>
-            <a:endParaRPr lang="en-US" sz="2600" dirty="0"/>
+              <a:t>67.0 – 72.0%</a:t>
+            </a:r>
+            <a:endParaRPr lang="en-US" sz="4000" dirty="0"/>
           </a:p>
         </p:txBody>
       </p:sp>
@@ -6732,24 +6732,24 @@
         </p:nvSpPr>
         <p:spPr>
           <a:xfrm>
-            <a:off x="6793992" y="3218688"/>
-            <a:ext cx="4480560" cy="548640"/>
-          </a:xfrm>
-          <a:prstGeom prst="rect">
-            <a:avLst/>
-          </a:prstGeom>
-          <a:noFill/>
-          <a:ln/>
-        </p:spPr>
-        <p:txBody>
-          <a:bodyPr wrap="square" lIns="0" tIns="0" rIns="0" bIns="0" rtlCol="0" anchor="ctr"/>
-          <a:lstStyle/>
-          <a:p>
-            <a:pPr indent="0" marL="0">
-              <a:buNone/>
-            </a:pPr>
-            <a:r>
-              <a:rPr lang="en-US" sz="1400" dirty="0">
+            <a:off x="6793992" y="3127248"/>
+            <a:ext cx="4480560" cy="640080"/>
+          </a:xfrm>
+          <a:prstGeom prst="rect">
+            <a:avLst/>
+          </a:prstGeom>
+          <a:noFill/>
+          <a:ln/>
+        </p:spPr>
+        <p:txBody>
+          <a:bodyPr wrap="square" lIns="0" tIns="0" rIns="0" bIns="0" rtlCol="0" anchor="ctr"/>
+          <a:lstStyle/>
+          <a:p>
+            <a:pPr indent="0" marL="0">
+              <a:buNone/>
+            </a:pPr>
+            <a:r>
+              <a:rPr lang="en-US" sz="1300" dirty="0">
                 <a:solidFill>
                   <a:srgbClr val="9AAAC4"/>
                 </a:solidFill>
@@ -6757,9 +6757,26 @@
                 <a:ea typeface="Calibri" pitchFamily="34" charset="-122"/>
                 <a:cs typeface="Calibri" pitchFamily="34" charset="-120"/>
               </a:rPr>
-              <a:t>Different every time. A 4-point swing around a ~1-point effect.</a:t>
-            </a:r>
-            <a:endParaRPr lang="en-US" sz="1400" dirty="0"/>
+              <a:t>72.0 · 71.7 · 70.0 · 68.0 · 67.0 — mean 69.7,</a:t>
+            </a:r>
+            <a:endParaRPr lang="en-US" sz="1300" dirty="0"/>
+          </a:p>
+          <a:p>
+            <a:pPr indent="0" marL="0">
+              <a:buNone/>
+            </a:pPr>
+            <a:r>
+              <a:rPr lang="en-US" sz="1300" dirty="0">
+                <a:solidFill>
+                  <a:srgbClr val="9AAAC4"/>
+                </a:solidFill>
+                <a:latin typeface="Calibri" pitchFamily="34" charset="0"/>
+                <a:ea typeface="Calibri" pitchFamily="34" charset="-122"/>
+                <a:cs typeface="Calibri" pitchFamily="34" charset="-120"/>
+              </a:rPr>
+              <a:t>which is BELOW the model-off figure.</a:t>
+            </a:r>
+            <a:endParaRPr lang="en-US" sz="1300" dirty="0"/>
           </a:p>
         </p:txBody>
       </p:sp>
